--- a/slides/release/05-testing-evaluating.pptx
+++ b/slides/release/05-testing-evaluating.pptx
@@ -2506,13 +2506,13 @@
           <p:nvPr>
             <p:extLst>
               <p:ext uri="{D42A27DB-BD31-4B8C-83A1-F6EECF244321}">
-                <p14:modId xmlns:p14="http://schemas.microsoft.com/office/powerpoint/2010/main" val="2321389627"/>
+                <p14:modId xmlns:p14="http://schemas.microsoft.com/office/powerpoint/2010/main" val="2537217804"/>
               </p:ext>
             </p:extLst>
           </p:nvPr>
         </p:nvGraphicFramePr>
         <p:xfrm>
-          <a:off x="258762" y="2777331"/>
+          <a:off x="237744" y="2191512"/>
           <a:ext cx="8915400" cy="3566160"/>
         </p:xfrm>
         <a:graphic>
@@ -2815,7 +2815,7 @@
         </p:nvSpPr>
         <p:spPr>
           <a:xfrm>
-            <a:off x="495300" y="6863975"/>
+            <a:off x="234950" y="6940582"/>
             <a:ext cx="7507224" cy="877824"/>
           </a:xfrm>
           <a:prstGeom prst="rect">
@@ -2850,7 +2850,7 @@
           <a:p>
             <a:pPr algn="ctr"/>
             <a:r>
-              <a:rPr sz="1800" i="1">
+              <a:rPr sz="1800" i="1" dirty="0">
                 <a:solidFill>
                   <a:srgbClr val="333333"/>
                 </a:solidFill>
@@ -2985,7 +2985,7 @@
         </p:nvSpPr>
         <p:spPr>
           <a:xfrm>
-            <a:off x="495300" y="5444331"/>
+            <a:off x="704088" y="6627481"/>
             <a:ext cx="7507224" cy="877824"/>
           </a:xfrm>
           <a:prstGeom prst="rect">
@@ -3020,7 +3020,7 @@
           <a:p>
             <a:pPr algn="ctr"/>
             <a:r>
-              <a:rPr sz="1800" i="1">
+              <a:rPr sz="1800" i="1" dirty="0">
                 <a:solidFill>
                   <a:srgbClr val="333333"/>
                 </a:solidFill>
@@ -3214,7 +3214,7 @@
         </p:nvSpPr>
         <p:spPr>
           <a:xfrm>
-            <a:off x="571500" y="5520531"/>
+            <a:off x="495300" y="6661612"/>
             <a:ext cx="7507224" cy="877824"/>
           </a:xfrm>
           <a:prstGeom prst="rect">
@@ -3426,7 +3426,7 @@
         </p:nvSpPr>
         <p:spPr>
           <a:xfrm>
-            <a:off x="694563" y="5063331"/>
+            <a:off x="495300" y="6411569"/>
             <a:ext cx="7507224" cy="877824"/>
           </a:xfrm>
           <a:prstGeom prst="rect">
@@ -3658,7 +3658,7 @@
         </p:nvSpPr>
         <p:spPr>
           <a:xfrm>
-            <a:off x="495300" y="5977731"/>
+            <a:off x="704088" y="6739731"/>
             <a:ext cx="7507224" cy="877824"/>
           </a:xfrm>
           <a:prstGeom prst="rect">
@@ -3852,13 +3852,13 @@
           <p:nvPr>
             <p:extLst>
               <p:ext uri="{D42A27DB-BD31-4B8C-83A1-F6EECF244321}">
-                <p14:modId xmlns:p14="http://schemas.microsoft.com/office/powerpoint/2010/main" val="2277559527"/>
+                <p14:modId xmlns:p14="http://schemas.microsoft.com/office/powerpoint/2010/main" val="872930272"/>
               </p:ext>
             </p:extLst>
           </p:nvPr>
         </p:nvGraphicFramePr>
         <p:xfrm>
-          <a:off x="234950" y="3691731"/>
+          <a:off x="234950" y="3315692"/>
           <a:ext cx="8915400" cy="2194560"/>
         </p:xfrm>
         <a:graphic>
@@ -3890,7 +3890,7 @@
                   </a:extLst>
                 </a:gridCol>
               </a:tblGrid>
-              <a:tr h="0">
+              <a:tr h="139605">
                 <a:tc>
                   <a:txBody>
                     <a:bodyPr/>
@@ -4113,7 +4113,7 @@
         </p:nvSpPr>
         <p:spPr>
           <a:xfrm>
-            <a:off x="670750" y="6627481"/>
+            <a:off x="694563" y="6627481"/>
             <a:ext cx="7507224" cy="877824"/>
           </a:xfrm>
           <a:prstGeom prst="rect">
@@ -4293,7 +4293,7 @@
         </p:nvSpPr>
         <p:spPr>
           <a:xfrm>
-            <a:off x="225425" y="5520531"/>
+            <a:off x="694563" y="6333623"/>
             <a:ext cx="7507224" cy="877824"/>
           </a:xfrm>
           <a:prstGeom prst="rect">
@@ -4328,7 +4328,7 @@
           <a:p>
             <a:pPr algn="ctr"/>
             <a:r>
-              <a:rPr sz="1800" i="1" dirty="0">
+              <a:rPr sz="1800" i="1">
                 <a:solidFill>
                   <a:srgbClr val="333333"/>
                 </a:solidFill>
@@ -4478,7 +4478,7 @@
         </p:nvSpPr>
         <p:spPr>
           <a:xfrm>
-            <a:off x="258762" y="5368131"/>
+            <a:off x="571500" y="6282531"/>
             <a:ext cx="7507224" cy="877824"/>
           </a:xfrm>
           <a:prstGeom prst="rect">
@@ -4791,7 +4791,7 @@
         </p:nvSpPr>
         <p:spPr>
           <a:xfrm>
-            <a:off x="704088" y="5825331"/>
+            <a:off x="571500" y="5931806"/>
             <a:ext cx="7507224" cy="1316736"/>
           </a:xfrm>
           <a:prstGeom prst="rect">
